--- a/Bases de Datos II/Clases/Clase 10 - Control de concurrencia/Presentacion.pptx
+++ b/Bases de Datos II/Clases/Clase 10 - Control de concurrencia/Presentacion.pptx
@@ -21,8 +21,6 @@
     <p:sldId id="269" r:id="rId20"/>
     <p:sldId id="270" r:id="rId21"/>
     <p:sldId id="271" r:id="rId22"/>
-    <p:sldId id="272" r:id="rId23"/>
-    <p:sldId id="273" r:id="rId24"/>
   </p:sldIdLst>
   <p:sldSz cx="12191695" cy="6858000" type="screen4x3"/>
   <p:notesSz cx="6858000" cy="9144000"/>
@@ -6521,1017 +6519,6 @@
         <p:spPr>
           <a:xfrm>
             <a:off x="0" y="0"/>
-            <a:ext cx="12191695" cy="1170432"/>
-          </a:xfrm>
-          <a:prstGeom prst="rect">
-            <a:avLst/>
-          </a:prstGeom>
-          <a:solidFill>
-            <a:srgbClr val="095292"/>
-          </a:solidFill>
-          <a:ln>
-            <a:noFill/>
-          </a:ln>
-        </p:spPr>
-        <p:style>
-          <a:lnRef idx="1">
-            <a:schemeClr val="accent1"/>
-          </a:lnRef>
-          <a:fillRef idx="3">
-            <a:schemeClr val="accent1"/>
-          </a:fillRef>
-          <a:effectRef idx="2">
-            <a:schemeClr val="accent1"/>
-          </a:effectRef>
-          <a:fontRef idx="minor">
-            <a:schemeClr val="lt1"/>
-          </a:fontRef>
-        </p:style>
-        <p:txBody>
-          <a:bodyPr rtlCol="0" anchor="ctr"/>
-          <a:lstStyle/>
-          <a:p>
-            <a:pPr algn="ctr"/>
-          </a:p>
-        </p:txBody>
-      </p:sp>
-      <p:sp>
-        <p:nvSpPr>
-          <p:cNvPr id="3" name="Rectangle 2"/>
-          <p:cNvSpPr/>
-          <p:nvPr/>
-        </p:nvSpPr>
-        <p:spPr>
-          <a:xfrm>
-            <a:off x="0" y="1170432"/>
-            <a:ext cx="12191695" cy="41148"/>
-          </a:xfrm>
-          <a:prstGeom prst="rect">
-            <a:avLst/>
-          </a:prstGeom>
-          <a:solidFill>
-            <a:srgbClr val="FFD000"/>
-          </a:solidFill>
-          <a:ln>
-            <a:noFill/>
-          </a:ln>
-        </p:spPr>
-        <p:style>
-          <a:lnRef idx="1">
-            <a:schemeClr val="accent1"/>
-          </a:lnRef>
-          <a:fillRef idx="3">
-            <a:schemeClr val="accent1"/>
-          </a:fillRef>
-          <a:effectRef idx="2">
-            <a:schemeClr val="accent1"/>
-          </a:effectRef>
-          <a:fontRef idx="minor">
-            <a:schemeClr val="lt1"/>
-          </a:fontRef>
-        </p:style>
-        <p:txBody>
-          <a:bodyPr rtlCol="0" anchor="ctr"/>
-          <a:lstStyle/>
-          <a:p>
-            <a:pPr algn="ctr"/>
-          </a:p>
-        </p:txBody>
-      </p:sp>
-      <p:sp>
-        <p:nvSpPr>
-          <p:cNvPr id="4" name="TextBox 3"/>
-          <p:cNvSpPr txBox="1"/>
-          <p:nvPr/>
-        </p:nvSpPr>
-        <p:spPr>
-          <a:xfrm>
-            <a:off x="457200" y="164592"/>
-            <a:ext cx="11277295" cy="384048"/>
-          </a:xfrm>
-          <a:prstGeom prst="rect">
-            <a:avLst/>
-          </a:prstGeom>
-          <a:noFill/>
-        </p:spPr>
-        <p:txBody>
-          <a:bodyPr wrap="square">
-            <a:spAutoFit/>
-          </a:bodyPr>
-          <a:lstStyle/>
-          <a:p>
-            <a:r>
-              <a:rPr sz="2600" b="1" i="0">
-                <a:solidFill>
-                  <a:srgbClr val="FFFFFF"/>
-                </a:solidFill>
-                <a:latin typeface="Calibri"/>
-              </a:rPr>
-              <a:t>Quiz rapido (cierre)</a:t>
-            </a:r>
-          </a:p>
-        </p:txBody>
-      </p:sp>
-      <p:sp>
-        <p:nvSpPr>
-          <p:cNvPr id="5" name="TextBox 4"/>
-          <p:cNvSpPr txBox="1"/>
-          <p:nvPr/>
-        </p:nvSpPr>
-        <p:spPr>
-          <a:xfrm>
-            <a:off x="457200" y="566928"/>
-            <a:ext cx="11277295" cy="411480"/>
-          </a:xfrm>
-          <a:prstGeom prst="rect">
-            <a:avLst/>
-          </a:prstGeom>
-          <a:noFill/>
-        </p:spPr>
-        <p:txBody>
-          <a:bodyPr wrap="square">
-            <a:spAutoFit/>
-          </a:bodyPr>
-          <a:lstStyle/>
-          <a:p>
-            <a:r>
-              <a:rPr sz="1400" b="0" i="0">
-                <a:solidFill>
-                  <a:srgbClr val="B8D8EE"/>
-                </a:solidFill>
-                <a:latin typeface="Calibri"/>
-              </a:rPr>
-              <a:t>Individual · 8–10 min</a:t>
-            </a:r>
-          </a:p>
-        </p:txBody>
-      </p:sp>
-      <p:sp>
-        <p:nvSpPr>
-          <p:cNvPr id="6" name="TextBox 5"/>
-          <p:cNvSpPr txBox="1"/>
-          <p:nvPr/>
-        </p:nvSpPr>
-        <p:spPr>
-          <a:xfrm>
-            <a:off x="457200" y="1380744"/>
-            <a:ext cx="11277295" cy="5020056"/>
-          </a:xfrm>
-          <a:prstGeom prst="rect">
-            <a:avLst/>
-          </a:prstGeom>
-          <a:noFill/>
-        </p:spPr>
-        <p:txBody>
-          <a:bodyPr wrap="square">
-            <a:spAutoFit/>
-          </a:bodyPr>
-          <a:lstStyle/>
-          <a:p>
-            <a:pPr>
-              <a:spcAft>
-                <a:spcPts val="800"/>
-              </a:spcAft>
-            </a:pPr>
-            <a:r>
-              <a:rPr sz="1200" b="1" i="0">
-                <a:solidFill>
-                  <a:srgbClr val="333333"/>
-                </a:solidFill>
-                <a:latin typeface="Calibri"/>
-              </a:rPr>
-              <a:t>1.</a:t>
-            </a:r>
-            <a:r>
-              <a:rPr sz="1200" b="0" i="0">
-                <a:solidFill>
-                  <a:srgbClr val="333333"/>
-                </a:solidFill>
-                <a:latin typeface="Calibri"/>
-              </a:rPr>
-              <a:t> Control de concurrencia busca evitar principalmente:</a:t>
-            </a:r>
-          </a:p>
-          <a:p>
-            <a:pPr>
-              <a:spcAft>
-                <a:spcPts val="800"/>
-              </a:spcAft>
-            </a:pPr>
-            <a:r>
-              <a:rPr sz="1200" b="0" i="0">
-                <a:solidFill>
-                  <a:srgbClr val="333333"/>
-                </a:solidFill>
-                <a:latin typeface="Calibri"/>
-              </a:rPr>
-              <a:t>–   ('A) Diagramas bonitos', 1)</a:t>
-            </a:r>
-          </a:p>
-          <a:p>
-            <a:pPr>
-              <a:spcAft>
-                <a:spcPts val="800"/>
-              </a:spcAft>
-            </a:pPr>
-            <a:r>
-              <a:rPr sz="1200" b="0" i="0">
-                <a:solidFill>
-                  <a:srgbClr val="333333"/>
-                </a:solidFill>
-                <a:latin typeface="Calibri"/>
-              </a:rPr>
-              <a:t>–   ('B) Anomalías por lecturas/escrituras concurrentes', 1)</a:t>
-            </a:r>
-          </a:p>
-          <a:p>
-            <a:pPr>
-              <a:spcAft>
-                <a:spcPts val="800"/>
-              </a:spcAft>
-            </a:pPr>
-            <a:r>
-              <a:rPr sz="1200" b="0" i="0">
-                <a:solidFill>
-                  <a:srgbClr val="333333"/>
-                </a:solidFill>
-                <a:latin typeface="Calibri"/>
-              </a:rPr>
-              <a:t>–   ('C) Tener PK', 1)</a:t>
-            </a:r>
-          </a:p>
-          <a:p>
-            <a:pPr>
-              <a:spcAft>
-                <a:spcPts val="800"/>
-              </a:spcAft>
-            </a:pPr>
-            <a:r>
-              <a:rPr sz="1200" b="0" i="0">
-                <a:solidFill>
-                  <a:srgbClr val="333333"/>
-                </a:solidFill>
-                <a:latin typeface="Calibri"/>
-              </a:rPr>
-              <a:t>–   ('D) Usar draw.io', 1)</a:t>
-            </a:r>
-          </a:p>
-          <a:p>
-            <a:pPr>
-              <a:spcAft>
-                <a:spcPts val="800"/>
-              </a:spcAft>
-            </a:pPr>
-            <a:r>
-              <a:rPr sz="1200" b="0" i="0">
-                <a:solidFill>
-                  <a:srgbClr val="333333"/>
-                </a:solidFill>
-                <a:latin typeface="Calibri"/>
-              </a:rPr>
-              <a:t>–   </a:t>
-            </a:r>
-            <a:r>
-              <a:rPr sz="1200" b="1" i="0">
-                <a:solidFill>
-                  <a:srgbClr val="333333"/>
-                </a:solidFill>
-                <a:latin typeface="Calibri"/>
-              </a:rPr>
-              <a:t>2.</a:t>
-            </a:r>
-            <a:r>
-              <a:rPr sz="1200" b="0" i="0">
-                <a:solidFill>
-                  <a:srgbClr val="333333"/>
-                </a:solidFill>
-                <a:latin typeface="Calibri"/>
-              </a:rPr>
-              <a:t> Escenario VetCare sensible a concurrencia:</a:t>
-            </a:r>
-          </a:p>
-          <a:p>
-            <a:pPr>
-              <a:spcAft>
-                <a:spcPts val="800"/>
-              </a:spcAft>
-            </a:pPr>
-            <a:r>
-              <a:rPr sz="1200" b="0" i="0">
-                <a:solidFill>
-                  <a:srgbClr val="333333"/>
-                </a:solidFill>
-                <a:latin typeface="Calibri"/>
-              </a:rPr>
-              <a:t>–   ('A) Dos cajeros descontando el mismo insumo', 1)</a:t>
-            </a:r>
-          </a:p>
-          <a:p>
-            <a:pPr>
-              <a:spcAft>
-                <a:spcPts val="800"/>
-              </a:spcAft>
-            </a:pPr>
-            <a:r>
-              <a:rPr sz="1200" b="0" i="0">
-                <a:solidFill>
-                  <a:srgbClr val="333333"/>
-                </a:solidFill>
-                <a:latin typeface="Calibri"/>
-              </a:rPr>
-              <a:t>–   ('B) Leer el microcurrículo', 1)</a:t>
-            </a:r>
-          </a:p>
-          <a:p>
-            <a:pPr>
-              <a:spcAft>
-                <a:spcPts val="800"/>
-              </a:spcAft>
-            </a:pPr>
-            <a:r>
-              <a:rPr sz="1200" b="0" i="0">
-                <a:solidFill>
-                  <a:srgbClr val="333333"/>
-                </a:solidFill>
-                <a:latin typeface="Calibri"/>
-              </a:rPr>
-              <a:t>–   ('C) Cambiar el color del logo', 1)</a:t>
-            </a:r>
-          </a:p>
-          <a:p>
-            <a:pPr>
-              <a:spcAft>
-                <a:spcPts val="800"/>
-              </a:spcAft>
-            </a:pPr>
-            <a:r>
-              <a:rPr sz="1200" b="0" i="0">
-                <a:solidFill>
-                  <a:srgbClr val="333333"/>
-                </a:solidFill>
-                <a:latin typeface="Calibri"/>
-              </a:rPr>
-              <a:t>–   ('D) Exportar PNG del ER', 1)</a:t>
-            </a:r>
-          </a:p>
-          <a:p>
-            <a:pPr>
-              <a:spcAft>
-                <a:spcPts val="800"/>
-              </a:spcAft>
-            </a:pPr>
-            <a:r>
-              <a:rPr sz="1200" b="0" i="0">
-                <a:solidFill>
-                  <a:srgbClr val="333333"/>
-                </a:solidFill>
-                <a:latin typeface="Calibri"/>
-              </a:rPr>
-              <a:t>–   </a:t>
-            </a:r>
-            <a:r>
-              <a:rPr sz="1200" b="1" i="0">
-                <a:solidFill>
-                  <a:srgbClr val="333333"/>
-                </a:solidFill>
-                <a:latin typeface="Calibri"/>
-              </a:rPr>
-              <a:t>3.</a:t>
-            </a:r>
-            <a:r>
-              <a:rPr sz="1200" b="0" i="0">
-                <a:solidFill>
-                  <a:srgbClr val="333333"/>
-                </a:solidFill>
-                <a:latin typeface="Calibri"/>
-              </a:rPr>
-              <a:t> Aislar transacciones (niveles/locks) es tema de esta clase autónoma.</a:t>
-            </a:r>
-          </a:p>
-          <a:p>
-            <a:pPr>
-              <a:spcAft>
-                <a:spcPts val="800"/>
-              </a:spcAft>
-            </a:pPr>
-            <a:r>
-              <a:rPr sz="1200" b="0" i="0">
-                <a:solidFill>
-                  <a:srgbClr val="333333"/>
-                </a:solidFill>
-                <a:latin typeface="Calibri"/>
-              </a:rPr>
-              <a:t>–   ('( ) Verdadero    ( ) Falso', 1)</a:t>
-            </a:r>
-          </a:p>
-          <a:p>
-            <a:pPr>
-              <a:spcAft>
-                <a:spcPts val="800"/>
-              </a:spcAft>
-            </a:pPr>
-            <a:r>
-              <a:rPr sz="1200" b="0" i="0">
-                <a:solidFill>
-                  <a:srgbClr val="333333"/>
-                </a:solidFill>
-                <a:latin typeface="Calibri"/>
-              </a:rPr>
-              <a:t>–   </a:t>
-            </a:r>
-            <a:r>
-              <a:rPr sz="1200" b="1" i="0">
-                <a:solidFill>
-                  <a:srgbClr val="333333"/>
-                </a:solidFill>
-                <a:latin typeface="Calibri"/>
-              </a:rPr>
-              <a:t>4.</a:t>
-            </a:r>
-            <a:r>
-              <a:rPr sz="1200" b="0" i="0">
-                <a:solidFill>
-                  <a:srgbClr val="333333"/>
-                </a:solidFill>
-                <a:latin typeface="Calibri"/>
-              </a:rPr>
-              <a:t> Si «funciona en mi prueba serial», ya está probada la concurrencia.</a:t>
-            </a:r>
-          </a:p>
-          <a:p>
-            <a:pPr>
-              <a:spcAft>
-                <a:spcPts val="800"/>
-              </a:spcAft>
-            </a:pPr>
-            <a:r>
-              <a:rPr sz="1200" b="0" i="0">
-                <a:solidFill>
-                  <a:srgbClr val="333333"/>
-                </a:solidFill>
-                <a:latin typeface="Calibri"/>
-              </a:rPr>
-              <a:t>–   ('( ) Verdadero    ( ) Falso', 1)</a:t>
-            </a:r>
-          </a:p>
-        </p:txBody>
-      </p:sp>
-      <p:sp>
-        <p:nvSpPr>
-          <p:cNvPr id="7" name="TextBox 6"/>
-          <p:cNvSpPr txBox="1"/>
-          <p:nvPr/>
-        </p:nvSpPr>
-        <p:spPr>
-          <a:xfrm>
-            <a:off x="11185855" y="6473952"/>
-            <a:ext cx="640080" cy="274320"/>
-          </a:xfrm>
-          <a:prstGeom prst="rect">
-            <a:avLst/>
-          </a:prstGeom>
-          <a:noFill/>
-        </p:spPr>
-        <p:txBody>
-          <a:bodyPr wrap="square">
-            <a:spAutoFit/>
-          </a:bodyPr>
-          <a:lstStyle/>
-          <a:p>
-            <a:pPr algn="r"/>
-            <a:r>
-              <a:rPr sz="1100" b="0" i="0">
-                <a:solidFill>
-                  <a:srgbClr val="666666"/>
-                </a:solidFill>
-                <a:latin typeface="Calibri"/>
-              </a:rPr>
-              <a:t>16</a:t>
-            </a:r>
-          </a:p>
-        </p:txBody>
-      </p:sp>
-    </p:spTree>
-  </p:cSld>
-  <p:clrMapOvr>
-    <a:masterClrMapping/>
-  </p:clrMapOvr>
-</p:sld>
-</file>
-
-<file path=ppt/slides/slide17.xml><?xml version="1.0" encoding="utf-8"?>
-<p:sld xmlns:a="http://schemas.openxmlformats.org/drawingml/2006/main" xmlns:p="http://schemas.openxmlformats.org/presentationml/2006/main" xmlns:r="http://schemas.openxmlformats.org/officeDocument/2006/relationships">
-  <p:cSld>
-    <p:bg>
-      <p:bgPr>
-        <a:solidFill>
-          <a:srgbClr val="FFFFFF"/>
-        </a:solidFill>
-        <a:effectLst/>
-      </p:bgPr>
-    </p:bg>
-    <p:spTree>
-      <p:nvGrpSpPr>
-        <p:cNvPr id="1" name=""/>
-        <p:cNvGrpSpPr/>
-        <p:nvPr/>
-      </p:nvGrpSpPr>
-      <p:grpSpPr/>
-      <p:sp>
-        <p:nvSpPr>
-          <p:cNvPr id="2" name="Rectangle 1"/>
-          <p:cNvSpPr/>
-          <p:nvPr/>
-        </p:nvSpPr>
-        <p:spPr>
-          <a:xfrm>
-            <a:off x="0" y="0"/>
-            <a:ext cx="12191695" cy="1170432"/>
-          </a:xfrm>
-          <a:prstGeom prst="rect">
-            <a:avLst/>
-          </a:prstGeom>
-          <a:solidFill>
-            <a:srgbClr val="095292"/>
-          </a:solidFill>
-          <a:ln>
-            <a:noFill/>
-          </a:ln>
-        </p:spPr>
-        <p:style>
-          <a:lnRef idx="1">
-            <a:schemeClr val="accent1"/>
-          </a:lnRef>
-          <a:fillRef idx="3">
-            <a:schemeClr val="accent1"/>
-          </a:fillRef>
-          <a:effectRef idx="2">
-            <a:schemeClr val="accent1"/>
-          </a:effectRef>
-          <a:fontRef idx="minor">
-            <a:schemeClr val="lt1"/>
-          </a:fontRef>
-        </p:style>
-        <p:txBody>
-          <a:bodyPr rtlCol="0" anchor="ctr"/>
-          <a:lstStyle/>
-          <a:p>
-            <a:pPr algn="ctr"/>
-          </a:p>
-        </p:txBody>
-      </p:sp>
-      <p:sp>
-        <p:nvSpPr>
-          <p:cNvPr id="3" name="Rectangle 2"/>
-          <p:cNvSpPr/>
-          <p:nvPr/>
-        </p:nvSpPr>
-        <p:spPr>
-          <a:xfrm>
-            <a:off x="0" y="1170432"/>
-            <a:ext cx="12191695" cy="41148"/>
-          </a:xfrm>
-          <a:prstGeom prst="rect">
-            <a:avLst/>
-          </a:prstGeom>
-          <a:solidFill>
-            <a:srgbClr val="FFD000"/>
-          </a:solidFill>
-          <a:ln>
-            <a:noFill/>
-          </a:ln>
-        </p:spPr>
-        <p:style>
-          <a:lnRef idx="1">
-            <a:schemeClr val="accent1"/>
-          </a:lnRef>
-          <a:fillRef idx="3">
-            <a:schemeClr val="accent1"/>
-          </a:fillRef>
-          <a:effectRef idx="2">
-            <a:schemeClr val="accent1"/>
-          </a:effectRef>
-          <a:fontRef idx="minor">
-            <a:schemeClr val="lt1"/>
-          </a:fontRef>
-        </p:style>
-        <p:txBody>
-          <a:bodyPr rtlCol="0" anchor="ctr"/>
-          <a:lstStyle/>
-          <a:p>
-            <a:pPr algn="ctr"/>
-          </a:p>
-        </p:txBody>
-      </p:sp>
-      <p:sp>
-        <p:nvSpPr>
-          <p:cNvPr id="4" name="TextBox 3"/>
-          <p:cNvSpPr txBox="1"/>
-          <p:nvPr/>
-        </p:nvSpPr>
-        <p:spPr>
-          <a:xfrm>
-            <a:off x="457200" y="164592"/>
-            <a:ext cx="11277295" cy="384048"/>
-          </a:xfrm>
-          <a:prstGeom prst="rect">
-            <a:avLst/>
-          </a:prstGeom>
-          <a:noFill/>
-        </p:spPr>
-        <p:txBody>
-          <a:bodyPr wrap="square">
-            <a:spAutoFit/>
-          </a:bodyPr>
-          <a:lstStyle/>
-          <a:p>
-            <a:r>
-              <a:rPr sz="2600" b="1" i="0">
-                <a:solidFill>
-                  <a:srgbClr val="FFFFFF"/>
-                </a:solidFill>
-                <a:latin typeface="Calibri"/>
-              </a:rPr>
-              <a:t>Quiz rapido (cierre) · cont. 2</a:t>
-            </a:r>
-          </a:p>
-        </p:txBody>
-      </p:sp>
-      <p:sp>
-        <p:nvSpPr>
-          <p:cNvPr id="5" name="TextBox 4"/>
-          <p:cNvSpPr txBox="1"/>
-          <p:nvPr/>
-        </p:nvSpPr>
-        <p:spPr>
-          <a:xfrm>
-            <a:off x="457200" y="566928"/>
-            <a:ext cx="11277295" cy="411480"/>
-          </a:xfrm>
-          <a:prstGeom prst="rect">
-            <a:avLst/>
-          </a:prstGeom>
-          <a:noFill/>
-        </p:spPr>
-        <p:txBody>
-          <a:bodyPr wrap="square">
-            <a:spAutoFit/>
-          </a:bodyPr>
-          <a:lstStyle/>
-          <a:p>
-            <a:r>
-              <a:rPr sz="1400" b="0" i="0">
-                <a:solidFill>
-                  <a:srgbClr val="B8D8EE"/>
-                </a:solidFill>
-                <a:latin typeface="Calibri"/>
-              </a:rPr>
-              <a:t>Individual · 8–10 min</a:t>
-            </a:r>
-          </a:p>
-        </p:txBody>
-      </p:sp>
-      <p:sp>
-        <p:nvSpPr>
-          <p:cNvPr id="6" name="TextBox 5"/>
-          <p:cNvSpPr txBox="1"/>
-          <p:nvPr/>
-        </p:nvSpPr>
-        <p:spPr>
-          <a:xfrm>
-            <a:off x="457200" y="1380744"/>
-            <a:ext cx="11277295" cy="5020056"/>
-          </a:xfrm>
-          <a:prstGeom prst="rect">
-            <a:avLst/>
-          </a:prstGeom>
-          <a:noFill/>
-        </p:spPr>
-        <p:txBody>
-          <a:bodyPr wrap="square">
-            <a:spAutoFit/>
-          </a:bodyPr>
-          <a:lstStyle/>
-          <a:p>
-            <a:pPr>
-              <a:spcAft>
-                <a:spcPts val="800"/>
-              </a:spcAft>
-            </a:pPr>
-            <a:r>
-              <a:rPr sz="1200" b="0" i="0">
-                <a:solidFill>
-                  <a:srgbClr val="333333"/>
-                </a:solidFill>
-                <a:latin typeface="Calibri"/>
-              </a:rPr>
-              <a:t>–   </a:t>
-            </a:r>
-            <a:r>
-              <a:rPr sz="1200" b="1" i="0">
-                <a:solidFill>
-                  <a:srgbClr val="333333"/>
-                </a:solidFill>
-                <a:latin typeface="Calibri"/>
-              </a:rPr>
-              <a:t>5.</a:t>
-            </a:r>
-            <a:r>
-              <a:rPr sz="1200" b="0" i="0">
-                <a:solidFill>
-                  <a:srgbClr val="333333"/>
-                </a:solidFill>
-                <a:latin typeface="Calibri"/>
-              </a:rPr>
-              <a:t> Estrategia conceptual frente a doble descuento de stock:</a:t>
-            </a:r>
-          </a:p>
-          <a:p>
-            <a:pPr>
-              <a:spcAft>
-                <a:spcPts val="800"/>
-              </a:spcAft>
-            </a:pPr>
-            <a:r>
-              <a:rPr sz="1200" b="0" i="0">
-                <a:solidFill>
-                  <a:srgbClr val="333333"/>
-                </a:solidFill>
-                <a:latin typeface="Calibri"/>
-              </a:rPr>
-              <a:t>–   ('A) Ignorar', 1)</a:t>
-            </a:r>
-          </a:p>
-          <a:p>
-            <a:pPr>
-              <a:spcAft>
-                <a:spcPts val="800"/>
-              </a:spcAft>
-            </a:pPr>
-            <a:r>
-              <a:rPr sz="1200" b="0" i="0">
-                <a:solidFill>
-                  <a:srgbClr val="333333"/>
-                </a:solidFill>
-                <a:latin typeface="Calibri"/>
-              </a:rPr>
-              <a:t>–   ('B) TX + verificación de stock / bloqueo o control optimista', 1)</a:t>
-            </a:r>
-          </a:p>
-          <a:p>
-            <a:pPr>
-              <a:spcAft>
-                <a:spcPts val="800"/>
-              </a:spcAft>
-            </a:pPr>
-            <a:r>
-              <a:rPr sz="1200" b="0" i="0">
-                <a:solidFill>
-                  <a:srgbClr val="333333"/>
-                </a:solidFill>
-                <a:latin typeface="Calibri"/>
-              </a:rPr>
-              <a:t>–   ('C) SELECT * sin WHERE', 1)</a:t>
-            </a:r>
-          </a:p>
-          <a:p>
-            <a:pPr>
-              <a:spcAft>
-                <a:spcPts val="800"/>
-              </a:spcAft>
-            </a:pPr>
-            <a:r>
-              <a:rPr sz="1200" b="0" i="0">
-                <a:solidFill>
-                  <a:srgbClr val="333333"/>
-                </a:solidFill>
-                <a:latin typeface="Calibri"/>
-              </a:rPr>
-              <a:t>–   ('D) Borrar la tabla', 1)</a:t>
-            </a:r>
-          </a:p>
-          <a:p>
-            <a:pPr>
-              <a:spcAft>
-                <a:spcPts val="800"/>
-              </a:spcAft>
-            </a:pPr>
-            <a:r>
-              <a:rPr sz="1200" b="0" i="0">
-                <a:solidFill>
-                  <a:srgbClr val="333333"/>
-                </a:solidFill>
-                <a:latin typeface="Calibri"/>
-              </a:rPr>
-              <a:t>–   </a:t>
-            </a:r>
-            <a:r>
-              <a:rPr sz="1200" b="1" i="0">
-                <a:solidFill>
-                  <a:srgbClr val="333333"/>
-                </a:solidFill>
-                <a:latin typeface="Calibri"/>
-              </a:rPr>
-              <a:t>6.</a:t>
-            </a:r>
-            <a:r>
-              <a:rPr sz="1200" b="0" i="0">
-                <a:solidFill>
-                  <a:srgbClr val="333333"/>
-                </a:solidFill>
-                <a:latin typeface="Calibri"/>
-              </a:rPr>
-              <a:t> Documentar el escenario concurrente (pasos A/B) es parte del entregable autónomo.</a:t>
-            </a:r>
-          </a:p>
-          <a:p>
-            <a:pPr>
-              <a:spcAft>
-                <a:spcPts val="800"/>
-              </a:spcAft>
-            </a:pPr>
-            <a:r>
-              <a:rPr sz="1200" b="0" i="0">
-                <a:solidFill>
-                  <a:srgbClr val="333333"/>
-                </a:solidFill>
-                <a:latin typeface="Calibri"/>
-              </a:rPr>
-              <a:t>–   ('( ) Verdadero    ( ) Falso', 1)</a:t>
-            </a:r>
-          </a:p>
-          <a:p>
-            <a:pPr>
-              <a:spcAft>
-                <a:spcPts val="800"/>
-              </a:spcAft>
-            </a:pPr>
-            <a:r>
-              <a:rPr sz="1200" b="0" i="0">
-                <a:solidFill>
-                  <a:srgbClr val="333333"/>
-                </a:solidFill>
-                <a:latin typeface="Calibri"/>
-              </a:rPr>
-              <a:t>–   </a:t>
-            </a:r>
-            <a:r>
-              <a:rPr sz="1200" b="1" i="0">
-                <a:solidFill>
-                  <a:srgbClr val="333333"/>
-                </a:solidFill>
-                <a:latin typeface="Calibri"/>
-              </a:rPr>
-              <a:t>7.</a:t>
-            </a:r>
-            <a:r>
-              <a:rPr sz="1200" b="0" i="0">
-                <a:solidFill>
-                  <a:srgbClr val="333333"/>
-                </a:solidFill>
-                <a:latin typeface="Calibri"/>
-              </a:rPr>
-              <a:t> Diseñe un caso A/B: dos sesiones tocando el mismo insumo VetCare.</a:t>
-            </a:r>
-          </a:p>
-          <a:p>
-            <a:pPr>
-              <a:spcAft>
-                <a:spcPts val="800"/>
-              </a:spcAft>
-            </a:pPr>
-            <a:r>
-              <a:rPr sz="1200" b="0" i="0">
-                <a:solidFill>
-                  <a:srgbClr val="333333"/>
-                </a:solidFill>
-                <a:latin typeface="Calibri"/>
-              </a:rPr>
-              <a:t>–   ('Respuesta corta: ____________________________', 1)</a:t>
-            </a:r>
-          </a:p>
-          <a:p>
-            <a:pPr>
-              <a:spcAft>
-                <a:spcPts val="800"/>
-              </a:spcAft>
-            </a:pPr>
-            <a:r>
-              <a:rPr sz="1200" b="0" i="0">
-                <a:solidFill>
-                  <a:srgbClr val="333333"/>
-                </a:solidFill>
-                <a:latin typeface="Calibri"/>
-              </a:rPr>
-              <a:t>–   </a:t>
-            </a:r>
-            <a:r>
-              <a:rPr sz="1200" b="1" i="0">
-                <a:solidFill>
-                  <a:srgbClr val="333333"/>
-                </a:solidFill>
-                <a:latin typeface="Calibri"/>
-              </a:rPr>
-              <a:t>8.</a:t>
-            </a:r>
-            <a:r>
-              <a:rPr sz="1200" b="0" i="0">
-                <a:solidFill>
-                  <a:srgbClr val="333333"/>
-                </a:solidFill>
-                <a:latin typeface="Calibri"/>
-              </a:rPr>
-              <a:t> ¿Qué evidencia capturaría en el playground para demostrar el control?</a:t>
-            </a:r>
-          </a:p>
-          <a:p>
-            <a:pPr>
-              <a:spcAft>
-                <a:spcPts val="800"/>
-              </a:spcAft>
-            </a:pPr>
-            <a:r>
-              <a:rPr sz="1200" b="0" i="0">
-                <a:solidFill>
-                  <a:srgbClr val="333333"/>
-                </a:solidFill>
-                <a:latin typeface="Calibri"/>
-              </a:rPr>
-              <a:t>–   ('Respuesta corta: ____________________________', 1)</a:t>
-            </a:r>
-          </a:p>
-        </p:txBody>
-      </p:sp>
-      <p:sp>
-        <p:nvSpPr>
-          <p:cNvPr id="7" name="TextBox 6"/>
-          <p:cNvSpPr txBox="1"/>
-          <p:nvPr/>
-        </p:nvSpPr>
-        <p:spPr>
-          <a:xfrm>
-            <a:off x="11185855" y="6473952"/>
-            <a:ext cx="640080" cy="274320"/>
-          </a:xfrm>
-          <a:prstGeom prst="rect">
-            <a:avLst/>
-          </a:prstGeom>
-          <a:noFill/>
-        </p:spPr>
-        <p:txBody>
-          <a:bodyPr wrap="square">
-            <a:spAutoFit/>
-          </a:bodyPr>
-          <a:lstStyle/>
-          <a:p>
-            <a:pPr algn="r"/>
-            <a:r>
-              <a:rPr sz="1100" b="0" i="0">
-                <a:solidFill>
-                  <a:srgbClr val="666666"/>
-                </a:solidFill>
-                <a:latin typeface="Calibri"/>
-              </a:rPr>
-              <a:t>17</a:t>
-            </a:r>
-          </a:p>
-        </p:txBody>
-      </p:sp>
-    </p:spTree>
-  </p:cSld>
-  <p:clrMapOvr>
-    <a:masterClrMapping/>
-  </p:clrMapOvr>
-</p:sld>
-</file>
-
-<file path=ppt/slides/slide18.xml><?xml version="1.0" encoding="utf-8"?>
-<p:sld xmlns:a="http://schemas.openxmlformats.org/drawingml/2006/main" xmlns:p="http://schemas.openxmlformats.org/presentationml/2006/main" xmlns:r="http://schemas.openxmlformats.org/officeDocument/2006/relationships">
-  <p:cSld>
-    <p:bg>
-      <p:bgPr>
-        <a:solidFill>
-          <a:srgbClr val="FFFFFF"/>
-        </a:solidFill>
-        <a:effectLst/>
-      </p:bgPr>
-    </p:bg>
-    <p:spTree>
-      <p:nvGrpSpPr>
-        <p:cNvPr id="1" name=""/>
-        <p:cNvGrpSpPr/>
-        <p:nvPr/>
-      </p:nvGrpSpPr>
-      <p:grpSpPr/>
-      <p:sp>
-        <p:nvSpPr>
-          <p:cNvPr id="2" name="Rectangle 1"/>
-          <p:cNvSpPr/>
-          <p:nvPr/>
-        </p:nvSpPr>
-        <p:spPr>
-          <a:xfrm>
-            <a:off x="0" y="0"/>
             <a:ext cx="12191695" cy="164592"/>
           </a:xfrm>
           <a:prstGeom prst="rect">
@@ -8860,7 +7847,7 @@
                 </a:solidFill>
                 <a:latin typeface="Calibri"/>
               </a:rPr>
-              <a:t>Criterios · quiz/cierre · duda PI</a:t>
+              <a:t>Criterios de exito · cierre · dudas del PI</a:t>
             </a:r>
           </a:p>
         </p:txBody>

--- a/Bases de Datos II/Clases/Clase 10 - Control de concurrencia/Presentacion.pptx
+++ b/Bases de Datos II/Clases/Clase 10 - Control de concurrencia/Presentacion.pptx
@@ -5849,7 +5849,7 @@
                 </a:solidFill>
                 <a:latin typeface="Calibri"/>
               </a:rPr>
-              <a:t> (Talleres) — domingo 23:59 cuando aplique taller.</a:t>
+              <a:t> (https://examlab.lovable.app/) — domingo 23:59 cuando aplique taller.</a:t>
             </a:r>
           </a:p>
         </p:txBody>
@@ -6444,7 +6444,7 @@
                 </a:solidFill>
                 <a:latin typeface="Calibri"/>
               </a:rPr>
-              <a:t>Taller de la semana en ExamLab: domingo 23:59 (regla del Acuerdo) cuando aplique.</a:t>
+              <a:t>Taller de la semana en ExamLab (https://examlab.lovable.app/): domingo 23:59 (regla del Acuerdo) cuando aplique.</a:t>
             </a:r>
           </a:p>
         </p:txBody>

--- a/Bases de Datos II/Clases/Clase 10 - Control de concurrencia/Presentacion.pptx
+++ b/Bases de Datos II/Clases/Clase 10 - Control de concurrencia/Presentacion.pptx
@@ -8185,22 +8185,6 @@
                 <a:latin typeface="Calibri"/>
               </a:rPr>
               <a:t>–   Mitigaciones concretas y accesibles para el PI: una restriccion UNIQUE sobre (id_veterinario, fecha_hora)…</a:t>
-            </a:r>
-          </a:p>
-          <a:p>
-            <a:pPr>
-              <a:spcAft>
-                <a:spcPts val="800"/>
-              </a:spcAft>
-            </a:pPr>
-            <a:r>
-              <a:rPr sz="1500" b="0" i="0">
-                <a:solidFill>
-                  <a:srgbClr val="333333"/>
-                </a:solidFill>
-                <a:latin typeface="Calibri"/>
-              </a:rPr>
-              <a:t>–   Error de docente que no domina el tema: creer que 'poner una transaccion' ya resuelve la concurrencia — una…</a:t>
             </a:r>
           </a:p>
         </p:txBody>

--- a/Bases de Datos II/Clases/Clase 10 - Control de concurrencia/Presentacion.pptx
+++ b/Bases de Datos II/Clases/Clase 10 - Control de concurrencia/Presentacion.pptx
@@ -5799,7 +5799,7 @@
                 </a:solidFill>
                 <a:latin typeface="Calibri"/>
               </a:rPr>
-              <a:t>–   Evidencia en playground (enlace) o archivo SQL/PNG del equipo.</a:t>
+              <a:t>–   Evidencia en playground (enlace) o archivo SQL/PNG propio.</a:t>
             </a:r>
           </a:p>
           <a:p>
@@ -7048,7 +7048,7 @@
                 </a:solidFill>
                 <a:latin typeface="Calibri"/>
               </a:rPr>
-              <a:t>–   Al salir: avance concreto en el paquete VetCare del equipo.</a:t>
+              <a:t>–   Al salir: avance concreto en su paquete VetCare.</a:t>
             </a:r>
           </a:p>
         </p:txBody>
@@ -9554,7 +9554,7 @@
                 </a:solidFill>
                 <a:latin typeface="Calibri"/>
               </a:rPr>
-              <a:t>–   Al final de la demo: dejar enlace/script compartible al equipo.</a:t>
+              <a:t>–   Al final de la demo: dejar enlace/script compartible al grupo.</a:t>
             </a:r>
           </a:p>
         </p:txBody>

--- a/Bases de Datos II/Clases/Clase 10 - Control de concurrencia/Presentacion.pptx
+++ b/Bases de Datos II/Clases/Clase 10 - Control de concurrencia/Presentacion.pptx
@@ -5849,7 +5849,7 @@
                 </a:solidFill>
                 <a:latin typeface="Calibri"/>
               </a:rPr>
-              <a:t> (https://examlab.lovable.app/) — domingo 23:59 cuando aplique taller.</a:t>
+              <a:t> (https://uniaj.examlab.workers.dev/) — domingo 23:59 cuando aplique taller.</a:t>
             </a:r>
           </a:p>
         </p:txBody>
@@ -6444,7 +6444,7 @@
                 </a:solidFill>
                 <a:latin typeface="Calibri"/>
               </a:rPr>
-              <a:t>Taller de la semana en ExamLab (https://examlab.lovable.app/): domingo 23:59 (regla del Acuerdo) cuando aplique.</a:t>
+              <a:t>Taller de la semana en ExamLab (https://uniaj.examlab.workers.dev/): domingo 23:59 (regla del Acuerdo) cuando aplique.</a:t>
             </a:r>
           </a:p>
         </p:txBody>

--- a/Bases de Datos II/Clases/Clase 10 - Control de concurrencia/Presentacion.pptx
+++ b/Bases de Datos II/Clases/Clase 10 - Control de concurrencia/Presentacion.pptx
@@ -4262,8 +4262,8 @@
         </p:nvSpPr>
         <p:spPr>
           <a:xfrm>
-            <a:off x="457200" y="1234440"/>
-            <a:ext cx="11277295" cy="777240"/>
+            <a:off x="457200" y="1554480"/>
+            <a:ext cx="11277295" cy="1051560"/>
           </a:xfrm>
           <a:prstGeom prst="roundRect">
             <a:avLst>
@@ -4307,7 +4307,7 @@
         </p:nvSpPr>
         <p:spPr>
           <a:xfrm>
-            <a:off x="594360" y="1403604"/>
+            <a:off x="594360" y="1860804"/>
             <a:ext cx="438912" cy="438912"/>
           </a:xfrm>
           <a:prstGeom prst="roundRect">
@@ -4352,7 +4352,7 @@
         </p:nvSpPr>
         <p:spPr>
           <a:xfrm>
-            <a:off x="594360" y="1403604"/>
+            <a:off x="594360" y="1860804"/>
             <a:ext cx="438912" cy="438912"/>
           </a:xfrm>
           <a:prstGeom prst="rect">
@@ -4385,8 +4385,8 @@
         </p:nvSpPr>
         <p:spPr>
           <a:xfrm>
-            <a:off x="1188720" y="1325880"/>
-            <a:ext cx="10271455" cy="612647"/>
+            <a:off x="1188720" y="1645920"/>
+            <a:ext cx="10271455" cy="886968"/>
           </a:xfrm>
           <a:prstGeom prst="rect">
             <a:avLst/>
@@ -4417,8 +4417,8 @@
         </p:nvSpPr>
         <p:spPr>
           <a:xfrm>
-            <a:off x="457200" y="2103120"/>
-            <a:ext cx="11277295" cy="777240"/>
+            <a:off x="457200" y="2697480"/>
+            <a:ext cx="11277295" cy="1051560"/>
           </a:xfrm>
           <a:prstGeom prst="roundRect">
             <a:avLst>
@@ -4462,7 +4462,7 @@
         </p:nvSpPr>
         <p:spPr>
           <a:xfrm>
-            <a:off x="594360" y="2272284"/>
+            <a:off x="594360" y="3003804"/>
             <a:ext cx="438912" cy="438912"/>
           </a:xfrm>
           <a:prstGeom prst="roundRect">
@@ -4507,7 +4507,7 @@
         </p:nvSpPr>
         <p:spPr>
           <a:xfrm>
-            <a:off x="594360" y="2272284"/>
+            <a:off x="594360" y="3003804"/>
             <a:ext cx="438912" cy="438912"/>
           </a:xfrm>
           <a:prstGeom prst="rect">
@@ -4540,8 +4540,8 @@
         </p:nvSpPr>
         <p:spPr>
           <a:xfrm>
-            <a:off x="1188720" y="2194560"/>
-            <a:ext cx="10271455" cy="612647"/>
+            <a:off x="1188720" y="2788920"/>
+            <a:ext cx="10271455" cy="886968"/>
           </a:xfrm>
           <a:prstGeom prst="rect">
             <a:avLst/>
@@ -4572,8 +4572,8 @@
         </p:nvSpPr>
         <p:spPr>
           <a:xfrm>
-            <a:off x="457200" y="2971800"/>
-            <a:ext cx="11277295" cy="777240"/>
+            <a:off x="457200" y="3840480"/>
+            <a:ext cx="11277295" cy="1051560"/>
           </a:xfrm>
           <a:prstGeom prst="roundRect">
             <a:avLst>
@@ -4617,7 +4617,7 @@
         </p:nvSpPr>
         <p:spPr>
           <a:xfrm>
-            <a:off x="594360" y="3140964"/>
+            <a:off x="594360" y="4146804"/>
             <a:ext cx="438912" cy="438912"/>
           </a:xfrm>
           <a:prstGeom prst="roundRect">
@@ -4662,7 +4662,7 @@
         </p:nvSpPr>
         <p:spPr>
           <a:xfrm>
-            <a:off x="594360" y="3140964"/>
+            <a:off x="594360" y="4146804"/>
             <a:ext cx="438912" cy="438912"/>
           </a:xfrm>
           <a:prstGeom prst="rect">
@@ -4695,8 +4695,8 @@
         </p:nvSpPr>
         <p:spPr>
           <a:xfrm>
-            <a:off x="1188720" y="3063240"/>
-            <a:ext cx="10271455" cy="612647"/>
+            <a:off x="1188720" y="3931920"/>
+            <a:ext cx="10271455" cy="886968"/>
           </a:xfrm>
           <a:prstGeom prst="rect">
             <a:avLst/>
@@ -4727,8 +4727,8 @@
         </p:nvSpPr>
         <p:spPr>
           <a:xfrm>
-            <a:off x="457200" y="3840479"/>
-            <a:ext cx="11277295" cy="777240"/>
+            <a:off x="457200" y="4983480"/>
+            <a:ext cx="11277295" cy="1051560"/>
           </a:xfrm>
           <a:prstGeom prst="roundRect">
             <a:avLst>
@@ -4772,7 +4772,7 @@
         </p:nvSpPr>
         <p:spPr>
           <a:xfrm>
-            <a:off x="594360" y="4009643"/>
+            <a:off x="594360" y="5289804"/>
             <a:ext cx="438912" cy="438912"/>
           </a:xfrm>
           <a:prstGeom prst="roundRect">
@@ -4817,7 +4817,7 @@
         </p:nvSpPr>
         <p:spPr>
           <a:xfrm>
-            <a:off x="594360" y="4009643"/>
+            <a:off x="594360" y="5289804"/>
             <a:ext cx="438912" cy="438912"/>
           </a:xfrm>
           <a:prstGeom prst="rect">
@@ -4850,8 +4850,8 @@
         </p:nvSpPr>
         <p:spPr>
           <a:xfrm>
-            <a:off x="1188720" y="3931919"/>
-            <a:ext cx="10271455" cy="612647"/>
+            <a:off x="1188720" y="5074920"/>
+            <a:ext cx="10271455" cy="886968"/>
           </a:xfrm>
           <a:prstGeom prst="rect">
             <a:avLst/>
@@ -9921,8 +9921,8 @@
         </p:blipFill>
         <p:spPr>
           <a:xfrm>
-            <a:off x="1743913" y="1792224"/>
-            <a:ext cx="1051560" cy="1051560"/>
+            <a:off x="1643329" y="1847087"/>
+            <a:ext cx="1252728" cy="1252728"/>
           </a:xfrm>
           <a:prstGeom prst="rect">
             <a:avLst/>
@@ -9937,8 +9937,8 @@
         </p:nvSpPr>
         <p:spPr>
           <a:xfrm>
-            <a:off x="530352" y="2916936"/>
-            <a:ext cx="3478682" cy="502920"/>
+            <a:off x="530352" y="3191256"/>
+            <a:ext cx="3478682" cy="621792"/>
           </a:xfrm>
           <a:prstGeom prst="rect">
             <a:avLst/>
@@ -10125,8 +10125,8 @@
         </p:blipFill>
         <p:spPr>
           <a:xfrm>
-            <a:off x="5570067" y="1792224"/>
-            <a:ext cx="1051560" cy="1051560"/>
+            <a:off x="5469483" y="1847087"/>
+            <a:ext cx="1252728" cy="1252728"/>
           </a:xfrm>
           <a:prstGeom prst="rect">
             <a:avLst/>
@@ -10141,8 +10141,8 @@
         </p:nvSpPr>
         <p:spPr>
           <a:xfrm>
-            <a:off x="4356506" y="2916936"/>
-            <a:ext cx="3478682" cy="502920"/>
+            <a:off x="4356506" y="3191256"/>
+            <a:ext cx="3478682" cy="621792"/>
           </a:xfrm>
           <a:prstGeom prst="rect">
             <a:avLst/>
@@ -10329,8 +10329,8 @@
         </p:blipFill>
         <p:spPr>
           <a:xfrm>
-            <a:off x="9396222" y="1792224"/>
-            <a:ext cx="1051560" cy="1051560"/>
+            <a:off x="9295638" y="1847087"/>
+            <a:ext cx="1252728" cy="1252728"/>
           </a:xfrm>
           <a:prstGeom prst="rect">
             <a:avLst/>
@@ -10345,8 +10345,8 @@
         </p:nvSpPr>
         <p:spPr>
           <a:xfrm>
-            <a:off x="8182660" y="2916936"/>
-            <a:ext cx="3478682" cy="502920"/>
+            <a:off x="8182660" y="3191256"/>
+            <a:ext cx="3478682" cy="621792"/>
           </a:xfrm>
           <a:prstGeom prst="rect">
             <a:avLst/>

--- a/Bases de Datos II/Clases/Clase 10 - Control de concurrencia/Presentacion.pptx
+++ b/Bases de Datos II/Clases/Clase 10 - Control de concurrencia/Presentacion.pptx
@@ -5799,7 +5799,23 @@
                 </a:solidFill>
                 <a:latin typeface="Calibri"/>
               </a:rPr>
-              <a:t>–   Evidencia en playground (enlace) o archivo SQL/PNG propio.</a:t>
+              <a:t>–   Evidencia: el SQL y su salida quedan guardados en cada pregunta de ExamLab.</a:t>
+            </a:r>
+          </a:p>
+          <a:p>
+            <a:pPr>
+              <a:spcAft>
+                <a:spcPts val="800"/>
+              </a:spcAft>
+            </a:pPr>
+            <a:r>
+              <a:rPr sz="1600" b="0" i="0">
+                <a:solidFill>
+                  <a:srgbClr val="333333"/>
+                </a:solidFill>
+                <a:latin typeface="Calibri"/>
+              </a:rPr>
+              <a:t>–   Conserva copia en tu carpeta del PI (los .sql que pide el entregable).</a:t>
             </a:r>
           </a:p>
           <a:p>

--- a/Bases de Datos II/Clases/Clase 10 - Control de concurrencia/Presentacion.pptx
+++ b/Bases de Datos II/Clases/Clase 10 - Control de concurrencia/Presentacion.pptx
@@ -3654,7 +3654,7 @@
               </a:spcAft>
             </a:pPr>
             <a:r>
-              <a:rPr sz="1500" b="0" i="0">
+              <a:rPr sz="2000" b="0" i="0">
                 <a:solidFill>
                   <a:srgbClr val="333333"/>
                 </a:solidFill>
@@ -3663,7 +3663,7 @@
               <a:t>–   </a:t>
             </a:r>
             <a:r>
-              <a:rPr sz="1500" b="1" i="0">
+              <a:rPr sz="2000" b="1" i="0">
                 <a:solidFill>
                   <a:srgbClr val="333333"/>
                 </a:solidFill>
@@ -3672,7 +3672,7 @@
               <a:t>Objetivo:</a:t>
             </a:r>
             <a:r>
-              <a:rPr sz="1500" b="0" i="0">
+              <a:rPr sz="2000" b="0" i="0">
                 <a:solidFill>
                   <a:srgbClr val="333333"/>
                 </a:solidFill>
@@ -3688,7 +3688,7 @@
               </a:spcAft>
             </a:pPr>
             <a:r>
-              <a:rPr sz="1500" b="0" i="0">
+              <a:rPr sz="2000" b="0" i="0">
                 <a:solidFill>
                   <a:srgbClr val="333333"/>
                 </a:solidFill>
@@ -3697,7 +3697,7 @@
               <a:t>–   </a:t>
             </a:r>
             <a:r>
-              <a:rPr sz="1500" b="1" i="0">
+              <a:rPr sz="2000" b="1" i="0">
                 <a:solidFill>
                   <a:srgbClr val="333333"/>
                 </a:solidFill>
@@ -3706,7 +3706,7 @@
               <a:t>Exito:</a:t>
             </a:r>
             <a:r>
-              <a:rPr sz="1500" b="0" i="0">
+              <a:rPr sz="2000" b="0" i="0">
                 <a:solidFill>
                   <a:srgbClr val="333333"/>
                 </a:solidFill>
@@ -3722,7 +3722,7 @@
               </a:spcAft>
             </a:pPr>
             <a:r>
-              <a:rPr sz="1500" b="0" i="0">
+              <a:rPr sz="2000" b="0" i="0">
                 <a:solidFill>
                   <a:srgbClr val="333333"/>
                 </a:solidFill>
@@ -3731,7 +3731,7 @@
               <a:t>–   </a:t>
             </a:r>
             <a:r>
-              <a:rPr sz="1500" b="1" i="0">
+              <a:rPr sz="2000" b="1" i="0">
                 <a:solidFill>
                   <a:srgbClr val="333333"/>
                 </a:solidFill>
@@ -3740,7 +3740,7 @@
               <a:t>Exito:</a:t>
             </a:r>
             <a:r>
-              <a:rPr sz="1500" b="0" i="0">
+              <a:rPr sz="2000" b="0" i="0">
                 <a:solidFill>
                   <a:srgbClr val="333333"/>
                 </a:solidFill>
@@ -3756,7 +3756,7 @@
               </a:spcAft>
             </a:pPr>
             <a:r>
-              <a:rPr sz="1500" b="0" i="0">
+              <a:rPr sz="2000" b="0" i="0">
                 <a:solidFill>
                   <a:srgbClr val="333333"/>
                 </a:solidFill>
@@ -3765,7 +3765,7 @@
               <a:t>–   </a:t>
             </a:r>
             <a:r>
-              <a:rPr sz="1500" b="1" i="0">
+              <a:rPr sz="2000" b="1" i="0">
                 <a:solidFill>
                   <a:srgbClr val="333333"/>
                 </a:solidFill>
@@ -3774,7 +3774,7 @@
               <a:t>Exito:</a:t>
             </a:r>
             <a:r>
-              <a:rPr sz="1500" b="0" i="0">
+              <a:rPr sz="2000" b="0" i="0">
                 <a:solidFill>
                   <a:srgbClr val="333333"/>
                 </a:solidFill>
@@ -3790,7 +3790,7 @@
               </a:spcAft>
             </a:pPr>
             <a:r>
-              <a:rPr sz="1500" b="0" i="0">
+              <a:rPr sz="2000" b="0" i="0">
                 <a:solidFill>
                   <a:srgbClr val="333333"/>
                 </a:solidFill>
@@ -3799,7 +3799,7 @@
               <a:t>–   </a:t>
             </a:r>
             <a:r>
-              <a:rPr sz="1500" b="1" i="0">
+              <a:rPr sz="2000" b="1" i="0">
                 <a:solidFill>
                   <a:srgbClr val="333333"/>
                 </a:solidFill>
@@ -3808,7 +3808,7 @@
               <a:t>Exito:</a:t>
             </a:r>
             <a:r>
-              <a:rPr sz="1500" b="0" i="0">
+              <a:rPr sz="2000" b="0" i="0">
                 <a:solidFill>
                   <a:srgbClr val="333333"/>
                 </a:solidFill>
@@ -3824,7 +3824,7 @@
               </a:spcAft>
             </a:pPr>
             <a:r>
-              <a:rPr sz="1500" b="0" i="0">
+              <a:rPr sz="2000" b="0" i="0">
                 <a:solidFill>
                   <a:srgbClr val="333333"/>
                 </a:solidFill>
@@ -3833,7 +3833,7 @@
               <a:t>–   </a:t>
             </a:r>
             <a:r>
-              <a:rPr sz="1500" b="1" i="0">
+              <a:rPr sz="2000" b="1" i="0">
                 <a:solidFill>
                   <a:srgbClr val="333333"/>
                 </a:solidFill>
@@ -3842,7 +3842,7 @@
               <a:t>Exito:</a:t>
             </a:r>
             <a:r>
-              <a:rPr sz="1500" b="0" i="0">
+              <a:rPr sz="2000" b="0" i="0">
                 <a:solidFill>
                   <a:srgbClr val="333333"/>
                 </a:solidFill>
@@ -4062,7 +4062,7 @@
               </a:spcAft>
             </a:pPr>
             <a:r>
-              <a:rPr sz="1600" b="0" i="0">
+              <a:rPr sz="2000" b="0" i="0">
                 <a:solidFill>
                   <a:srgbClr val="333333"/>
                 </a:solidFill>
@@ -5759,7 +5759,7 @@
               </a:spcAft>
             </a:pPr>
             <a:r>
-              <a:rPr sz="1600" b="0" i="0">
+              <a:rPr sz="2000" b="0" i="0">
                 <a:solidFill>
                   <a:srgbClr val="333333"/>
                 </a:solidFill>
@@ -5768,7 +5768,7 @@
               <a:t>–   </a:t>
             </a:r>
             <a:r>
-              <a:rPr sz="1600" b="1" i="0">
+              <a:rPr sz="2000" b="1" i="0">
                 <a:solidFill>
                   <a:srgbClr val="333333"/>
                 </a:solidFill>
@@ -5777,7 +5777,7 @@
               <a:t>Entregable:</a:t>
             </a:r>
             <a:r>
-              <a:rPr sz="1600" b="0" i="0">
+              <a:rPr sz="2000" b="0" i="0">
                 <a:solidFill>
                   <a:srgbClr val="333333"/>
                 </a:solidFill>
@@ -5793,7 +5793,7 @@
               </a:spcAft>
             </a:pPr>
             <a:r>
-              <a:rPr sz="1600" b="0" i="0">
+              <a:rPr sz="2000" b="0" i="0">
                 <a:solidFill>
                   <a:srgbClr val="333333"/>
                 </a:solidFill>
@@ -5809,7 +5809,7 @@
               </a:spcAft>
             </a:pPr>
             <a:r>
-              <a:rPr sz="1600" b="0" i="0">
+              <a:rPr sz="2000" b="0" i="0">
                 <a:solidFill>
                   <a:srgbClr val="333333"/>
                 </a:solidFill>
@@ -5825,7 +5825,7 @@
               </a:spcAft>
             </a:pPr>
             <a:r>
-              <a:rPr sz="1600" b="0" i="0">
+              <a:rPr sz="2000" b="0" i="0">
                 <a:solidFill>
                   <a:srgbClr val="333333"/>
                 </a:solidFill>
@@ -5841,7 +5841,7 @@
               </a:spcAft>
             </a:pPr>
             <a:r>
-              <a:rPr sz="1600" b="0" i="0">
+              <a:rPr sz="2000" b="0" i="0">
                 <a:solidFill>
                   <a:srgbClr val="333333"/>
                 </a:solidFill>
@@ -5850,7 +5850,7 @@
               <a:t>–   </a:t>
             </a:r>
             <a:r>
-              <a:rPr sz="1600" b="1" i="0">
+              <a:rPr sz="2000" b="1" i="0">
                 <a:solidFill>
                   <a:srgbClr val="333333"/>
                 </a:solidFill>
@@ -5859,7 +5859,7 @@
               <a:t>Entrega en ExamLab</a:t>
             </a:r>
             <a:r>
-              <a:rPr sz="1600" b="0" i="0">
+              <a:rPr sz="2000" b="0" i="0">
                 <a:solidFill>
                   <a:srgbClr val="333333"/>
                 </a:solidFill>
@@ -6906,7 +6906,7 @@
               </a:spcAft>
             </a:pPr>
             <a:r>
-              <a:rPr sz="1600" b="0" i="0">
+              <a:rPr sz="2000" b="0" i="0">
                 <a:solidFill>
                   <a:srgbClr val="333333"/>
                 </a:solidFill>
@@ -6915,7 +6915,7 @@
               <a:t>–   </a:t>
             </a:r>
             <a:r>
-              <a:rPr sz="1600" b="1" i="0">
+              <a:rPr sz="2000" b="1" i="0">
                 <a:solidFill>
                   <a:srgbClr val="333333"/>
                 </a:solidFill>
@@ -6924,7 +6924,7 @@
               <a:t>Hoy avanzamos el PI en:</a:t>
             </a:r>
             <a:r>
-              <a:rPr sz="1600" b="0" i="0">
+              <a:rPr sz="2000" b="0" i="0">
                 <a:solidFill>
                   <a:srgbClr val="333333"/>
                 </a:solidFill>
@@ -6940,7 +6940,7 @@
               </a:spcAft>
             </a:pPr>
             <a:r>
-              <a:rPr sz="1600" b="0" i="0">
+              <a:rPr sz="2000" b="0" i="0">
                 <a:solidFill>
                   <a:srgbClr val="333333"/>
                 </a:solidFill>
@@ -6949,7 +6949,7 @@
               <a:t>–   Herramienta: </a:t>
             </a:r>
             <a:r>
-              <a:rPr sz="1600" b="1" i="0">
+              <a:rPr sz="2000" b="1" i="0">
                 <a:solidFill>
                   <a:srgbClr val="333333"/>
                 </a:solidFill>
@@ -6958,7 +6958,7 @@
               <a:t>Google Docs + Live SQL</a:t>
             </a:r>
             <a:r>
-              <a:rPr sz="1600" b="0" i="0">
+              <a:rPr sz="2000" b="0" i="0">
                 <a:solidFill>
                   <a:srgbClr val="333333"/>
                 </a:solidFill>
@@ -6967,7 +6967,7 @@
               <a:t> · Bloque </a:t>
             </a:r>
             <a:r>
-              <a:rPr sz="1600" b="1" i="0">
+              <a:rPr sz="2000" b="1" i="0">
                 <a:solidFill>
                   <a:srgbClr val="333333"/>
                 </a:solidFill>
@@ -6976,7 +6976,7 @@
               <a:t>120 min</a:t>
             </a:r>
             <a:r>
-              <a:rPr sz="1600" b="0" i="0">
+              <a:rPr sz="2000" b="0" i="0">
                 <a:solidFill>
                   <a:srgbClr val="333333"/>
                 </a:solidFill>
@@ -6992,7 +6992,7 @@
               </a:spcAft>
             </a:pPr>
             <a:r>
-              <a:rPr sz="1600" b="0" i="0">
+              <a:rPr sz="2000" b="0" i="0">
                 <a:solidFill>
                   <a:srgbClr val="333333"/>
                 </a:solidFill>
@@ -7001,7 +7001,7 @@
               <a:t>–   </a:t>
             </a:r>
             <a:r>
-              <a:rPr sz="1600" b="1" i="0">
+              <a:rPr sz="2000" b="1" i="0">
                 <a:solidFill>
                   <a:srgbClr val="333333"/>
                 </a:solidFill>
@@ -7010,7 +7010,7 @@
               <a:t>Entregable de hoy:</a:t>
             </a:r>
             <a:r>
-              <a:rPr sz="1600" b="0" i="0">
+              <a:rPr sz="2000" b="0" i="0">
                 <a:solidFill>
                   <a:srgbClr val="333333"/>
                 </a:solidFill>
@@ -7026,7 +7026,7 @@
               </a:spcAft>
             </a:pPr>
             <a:r>
-              <a:rPr sz="1600" b="0" i="0">
+              <a:rPr sz="2000" b="0" i="0">
                 <a:solidFill>
                   <a:srgbClr val="333333"/>
                 </a:solidFill>
@@ -7042,7 +7042,7 @@
               </a:spcAft>
             </a:pPr>
             <a:r>
-              <a:rPr sz="1600" b="0" i="0">
+              <a:rPr sz="2000" b="0" i="0">
                 <a:solidFill>
                   <a:srgbClr val="333333"/>
                 </a:solidFill>
@@ -7058,7 +7058,7 @@
               </a:spcAft>
             </a:pPr>
             <a:r>
-              <a:rPr sz="1600" b="0" i="0">
+              <a:rPr sz="2000" b="0" i="0">
                 <a:solidFill>
                   <a:srgbClr val="333333"/>
                 </a:solidFill>
@@ -7382,7 +7382,7 @@
         <p:spPr>
           <a:xfrm>
             <a:off x="502920" y="2587752"/>
-            <a:ext cx="2164019" cy="2560320"/>
+            <a:ext cx="2164019" cy="3310128"/>
           </a:xfrm>
           <a:prstGeom prst="rect">
             <a:avLst/>
@@ -7497,7 +7497,7 @@
         <p:spPr>
           <a:xfrm>
             <a:off x="2758379" y="2587752"/>
-            <a:ext cx="2164019" cy="2560320"/>
+            <a:ext cx="2164019" cy="3310128"/>
           </a:xfrm>
           <a:prstGeom prst="rect">
             <a:avLst/>
@@ -7612,7 +7612,7 @@
         <p:spPr>
           <a:xfrm>
             <a:off x="5013838" y="2587752"/>
-            <a:ext cx="2164019" cy="2560320"/>
+            <a:ext cx="2164019" cy="3310128"/>
           </a:xfrm>
           <a:prstGeom prst="rect">
             <a:avLst/>
@@ -7727,7 +7727,7 @@
         <p:spPr>
           <a:xfrm>
             <a:off x="7269297" y="2587752"/>
-            <a:ext cx="2164019" cy="2560320"/>
+            <a:ext cx="2164019" cy="3310128"/>
           </a:xfrm>
           <a:prstGeom prst="rect">
             <a:avLst/>
@@ -7842,7 +7842,7 @@
         <p:spPr>
           <a:xfrm>
             <a:off x="9524756" y="2587752"/>
-            <a:ext cx="2164019" cy="2560320"/>
+            <a:ext cx="2164019" cy="3310128"/>
           </a:xfrm>
           <a:prstGeom prst="rect">
             <a:avLst/>
@@ -7876,8 +7876,8 @@
         </p:nvSpPr>
         <p:spPr>
           <a:xfrm>
-            <a:off x="457200" y="5943600"/>
-            <a:ext cx="11277295" cy="365760"/>
+            <a:off x="457200" y="5806440"/>
+            <a:ext cx="11277295" cy="640080"/>
           </a:xfrm>
           <a:prstGeom prst="rect">
             <a:avLst/>
@@ -8130,7 +8130,7 @@
               </a:spcAft>
             </a:pPr>
             <a:r>
-              <a:rPr sz="1500" b="0" i="0">
+              <a:rPr sz="2000" b="0" i="0">
                 <a:solidFill>
                   <a:srgbClr val="333333"/>
                 </a:solidFill>
@@ -8146,7 +8146,7 @@
               </a:spcAft>
             </a:pPr>
             <a:r>
-              <a:rPr sz="1500" b="0" i="0">
+              <a:rPr sz="2000" b="0" i="0">
                 <a:solidFill>
                   <a:srgbClr val="333333"/>
                 </a:solidFill>
@@ -8162,7 +8162,7 @@
               </a:spcAft>
             </a:pPr>
             <a:r>
-              <a:rPr sz="1500" b="0" i="0">
+              <a:rPr sz="2000" b="0" i="0">
                 <a:solidFill>
                   <a:srgbClr val="333333"/>
                 </a:solidFill>
@@ -8178,7 +8178,7 @@
               </a:spcAft>
             </a:pPr>
             <a:r>
-              <a:rPr sz="1500" b="0" i="0">
+              <a:rPr sz="2000" b="0" i="0">
                 <a:solidFill>
                   <a:srgbClr val="333333"/>
                 </a:solidFill>
@@ -8194,7 +8194,7 @@
               </a:spcAft>
             </a:pPr>
             <a:r>
-              <a:rPr sz="1500" b="0" i="0">
+              <a:rPr sz="2000" b="0" i="0">
                 <a:solidFill>
                   <a:srgbClr val="333333"/>
                 </a:solidFill>
@@ -9480,7 +9480,7 @@
               </a:spcAft>
             </a:pPr>
             <a:r>
-              <a:rPr sz="1600" b="0" i="0">
+              <a:rPr sz="2000" b="0" i="0">
                 <a:solidFill>
                   <a:srgbClr val="333333"/>
                 </a:solidFill>
@@ -9489,7 +9489,7 @@
               <a:t>–   </a:t>
             </a:r>
             <a:r>
-              <a:rPr sz="1600" b="1" i="0">
+              <a:rPr sz="2000" b="1" i="0">
                 <a:solidFill>
                   <a:srgbClr val="333333"/>
                 </a:solidFill>
@@ -9498,7 +9498,7 @@
               <a:t>Herramienta:</a:t>
             </a:r>
             <a:r>
-              <a:rPr sz="1600" b="0" i="0">
+              <a:rPr sz="2000" b="0" i="0">
                 <a:solidFill>
                   <a:srgbClr val="333333"/>
                 </a:solidFill>
@@ -9514,7 +9514,7 @@
               </a:spcAft>
             </a:pPr>
             <a:r>
-              <a:rPr sz="1600" b="0" i="0">
+              <a:rPr sz="2000" b="0" i="0">
                 <a:solidFill>
                   <a:srgbClr val="333333"/>
                 </a:solidFill>
@@ -9523,7 +9523,7 @@
               <a:t>–   </a:t>
             </a:r>
             <a:r>
-              <a:rPr sz="1600" b="1" i="0">
+              <a:rPr sz="2000" b="1" i="0">
                 <a:solidFill>
                   <a:srgbClr val="333333"/>
                 </a:solidFill>
@@ -9532,7 +9532,7 @@
               <a:t>Demo:</a:t>
             </a:r>
             <a:r>
-              <a:rPr sz="1600" b="0" i="0">
+              <a:rPr sz="2000" b="0" i="0">
                 <a:solidFill>
                   <a:srgbClr val="333333"/>
                 </a:solidFill>
@@ -9548,7 +9548,7 @@
               </a:spcAft>
             </a:pPr>
             <a:r>
-              <a:rPr sz="1600" b="0" i="0">
+              <a:rPr sz="2000" b="0" i="0">
                 <a:solidFill>
                   <a:srgbClr val="333333"/>
                 </a:solidFill>
@@ -9564,7 +9564,7 @@
               </a:spcAft>
             </a:pPr>
             <a:r>
-              <a:rPr sz="1600" b="0" i="0">
+              <a:rPr sz="2000" b="0" i="0">
                 <a:solidFill>
                   <a:srgbClr val="333333"/>
                 </a:solidFill>
@@ -10611,7 +10611,7 @@
               </a:spcAft>
             </a:pPr>
             <a:r>
-              <a:rPr sz="1600" b="0" i="0">
+              <a:rPr sz="2000" b="0" i="0">
                 <a:solidFill>
                   <a:srgbClr val="333333"/>
                 </a:solidFill>
@@ -10620,7 +10620,7 @@
               <a:t>–   </a:t>
             </a:r>
             <a:r>
-              <a:rPr sz="1600" b="1" i="0">
+              <a:rPr sz="2000" b="1" i="0">
                 <a:solidFill>
                   <a:srgbClr val="333333"/>
                 </a:solidFill>
@@ -10629,7 +10629,7 @@
               <a:t>Por qué importa al PI:</a:t>
             </a:r>
             <a:r>
-              <a:rPr sz="1600" b="0" i="0">
+              <a:rPr sz="2000" b="0" i="0">
                 <a:solidFill>
                   <a:srgbClr val="333333"/>
                 </a:solidFill>
@@ -10645,7 +10645,7 @@
               </a:spcAft>
             </a:pPr>
             <a:r>
-              <a:rPr sz="1600" b="0" i="0">
+              <a:rPr sz="2000" b="0" i="0">
                 <a:solidFill>
                   <a:srgbClr val="333333"/>
                 </a:solidFill>

--- a/Bases de Datos II/Clases/Clase 10 - Control de concurrencia/Presentacion.pptx
+++ b/Bases de Datos II/Clases/Clase 10 - Control de concurrencia/Presentacion.pptx
@@ -3848,7 +3848,7 @@
                 </a:solidFill>
                 <a:latin typeface="Calibri"/>
               </a:rPr>
-              <a:t> Domingo 23:59.</a:t>
+              <a:t> en la fecha que indique el docente.</a:t>
             </a:r>
           </a:p>
         </p:txBody>
@@ -5799,7 +5799,7 @@
                 </a:solidFill>
                 <a:latin typeface="Calibri"/>
               </a:rPr>
-              <a:t>–   Evidencia: el SQL y su salida quedan guardados en cada pregunta de ExamLab.</a:t>
+              <a:t>–   Evidencia: el SQL y su salida quedan guardados en cada pregunta de la plataforma del curso.</a:t>
             </a:r>
           </a:p>
           <a:p>
@@ -5856,7 +5856,7 @@
                 </a:solidFill>
                 <a:latin typeface="Calibri"/>
               </a:rPr>
-              <a:t>Entrega en ExamLab</a:t>
+              <a:t>Entrega en la plataforma del curso</a:t>
             </a:r>
             <a:r>
               <a:rPr sz="2000" b="0" i="0">
@@ -5865,7 +5865,7 @@
                 </a:solidFill>
                 <a:latin typeface="Calibri"/>
               </a:rPr>
-              <a:t> (https://uniaj.examlab.workers.dev/) — domingo 23:59 cuando aplique taller.</a:t>
+              <a:t> — en la fecha que indique el docente.</a:t>
             </a:r>
           </a:p>
         </p:txBody>
@@ -6460,7 +6460,7 @@
                 </a:solidFill>
                 <a:latin typeface="Calibri"/>
               </a:rPr>
-              <a:t>Taller de la semana en ExamLab (https://uniaj.examlab.workers.dev/): domingo 23:59 (regla del Acuerdo) cuando aplique.</a:t>
+              <a:t>Si el docente asigna taller esta semana, él indica el canal y la fecha.</a:t>
             </a:r>
           </a:p>
         </p:txBody>
